--- a/docs/pptx/carbo/ritu-carbo-linsubhr-dosedisc-grade3.pptx
+++ b/docs/pptx/carbo/ritu-carbo-linsubhr-dosedisc-grade3.pptx
@@ -2443,7 +2443,7 @@
           </p:nvSpPr>
           <p:spPr>
             <a:xfrm>
-              <a:off x="909675" y="1896563"/>
+              <a:off x="911833" y="1896563"/>
               <a:ext cx="0" cy="3826579"/>
             </a:xfrm>
             <a:custGeom>
@@ -2486,7 +2486,7 @@
           </p:nvSpPr>
           <p:spPr>
             <a:xfrm>
-              <a:off x="3323794" y="1896563"/>
+              <a:off x="3322810" y="1896563"/>
               <a:ext cx="0" cy="3826579"/>
             </a:xfrm>
             <a:custGeom>
@@ -2529,7 +2529,7 @@
           </p:nvSpPr>
           <p:spPr>
             <a:xfrm>
-              <a:off x="5737913" y="1896563"/>
+              <a:off x="5733788" y="1896563"/>
               <a:ext cx="0" cy="3826579"/>
             </a:xfrm>
             <a:custGeom>
@@ -2572,7 +2572,7 @@
           </p:nvSpPr>
           <p:spPr>
             <a:xfrm>
-              <a:off x="8152032" y="1896563"/>
+              <a:off x="8144765" y="1896563"/>
               <a:ext cx="0" cy="3826579"/>
             </a:xfrm>
             <a:custGeom>
@@ -2830,7 +2830,7 @@
           </p:nvSpPr>
           <p:spPr>
             <a:xfrm>
-              <a:off x="2116734" y="1896563"/>
+              <a:off x="2117321" y="1896563"/>
               <a:ext cx="0" cy="3826579"/>
             </a:xfrm>
             <a:custGeom>
@@ -2873,7 +2873,7 @@
           </p:nvSpPr>
           <p:spPr>
             <a:xfrm>
-              <a:off x="4530853" y="1896563"/>
+              <a:off x="4528299" y="1896563"/>
               <a:ext cx="0" cy="3826579"/>
             </a:xfrm>
             <a:custGeom>
@@ -2916,7 +2916,7 @@
           </p:nvSpPr>
           <p:spPr>
             <a:xfrm>
-              <a:off x="6944973" y="1896563"/>
+              <a:off x="6939276" y="1896563"/>
               <a:ext cx="0" cy="3826579"/>
             </a:xfrm>
             <a:custGeom>
@@ -2960,527 +2960,527 @@
           <p:spPr>
             <a:xfrm>
               <a:off x="1172049" y="1896563"/>
-              <a:ext cx="7090630" cy="3602069"/>
+              <a:ext cx="7090630" cy="3601981"/>
             </a:xfrm>
             <a:custGeom>
               <a:avLst/>
               <a:pathLst>
-                <a:path w="7090630" h="3602069">
+                <a:path w="7090630" h="3601981">
                   <a:moveTo>
-                    <a:pt x="0" y="3154649"/>
+                    <a:pt x="0" y="3151485"/>
                   </a:moveTo>
                   <a:lnTo>
-                    <a:pt x="71622" y="3148587"/>
-                  </a:lnTo>
-                  <a:lnTo>
-                    <a:pt x="143245" y="3142451"/>
-                  </a:lnTo>
-                  <a:lnTo>
-                    <a:pt x="214867" y="3136240"/>
-                  </a:lnTo>
-                  <a:lnTo>
-                    <a:pt x="286490" y="3129954"/>
-                  </a:lnTo>
-                  <a:lnTo>
-                    <a:pt x="358112" y="3123591"/>
-                  </a:lnTo>
-                  <a:lnTo>
-                    <a:pt x="429735" y="3117151"/>
-                  </a:lnTo>
-                  <a:lnTo>
-                    <a:pt x="501357" y="3110632"/>
-                  </a:lnTo>
-                  <a:lnTo>
-                    <a:pt x="572980" y="3104034"/>
-                  </a:lnTo>
-                  <a:lnTo>
-                    <a:pt x="644602" y="3097356"/>
-                  </a:lnTo>
-                  <a:lnTo>
-                    <a:pt x="716225" y="3090596"/>
-                  </a:lnTo>
-                  <a:lnTo>
-                    <a:pt x="787847" y="3083754"/>
-                  </a:lnTo>
-                  <a:lnTo>
-                    <a:pt x="859470" y="3076829"/>
-                  </a:lnTo>
-                  <a:lnTo>
-                    <a:pt x="931092" y="3069820"/>
-                  </a:lnTo>
-                  <a:lnTo>
-                    <a:pt x="1002715" y="3062725"/>
-                  </a:lnTo>
-                  <a:lnTo>
-                    <a:pt x="1074337" y="3055544"/>
-                  </a:lnTo>
-                  <a:lnTo>
-                    <a:pt x="1145960" y="3048275"/>
-                  </a:lnTo>
-                  <a:lnTo>
-                    <a:pt x="1217582" y="3040918"/>
-                  </a:lnTo>
-                  <a:lnTo>
-                    <a:pt x="1289205" y="3033471"/>
-                  </a:lnTo>
-                  <a:lnTo>
-                    <a:pt x="1360827" y="3025934"/>
-                  </a:lnTo>
-                  <a:lnTo>
-                    <a:pt x="1432450" y="3018305"/>
-                  </a:lnTo>
-                  <a:lnTo>
-                    <a:pt x="1504073" y="3010583"/>
-                  </a:lnTo>
-                  <a:lnTo>
-                    <a:pt x="1575695" y="3002767"/>
-                  </a:lnTo>
-                  <a:lnTo>
-                    <a:pt x="1647318" y="2994856"/>
-                  </a:lnTo>
-                  <a:lnTo>
-                    <a:pt x="1718940" y="2986849"/>
-                  </a:lnTo>
-                  <a:lnTo>
-                    <a:pt x="1790563" y="2978744"/>
-                  </a:lnTo>
-                  <a:lnTo>
-                    <a:pt x="1862185" y="2970540"/>
-                  </a:lnTo>
-                  <a:lnTo>
-                    <a:pt x="1933808" y="2962237"/>
-                  </a:lnTo>
-                  <a:lnTo>
-                    <a:pt x="2005430" y="2953833"/>
-                  </a:lnTo>
-                  <a:lnTo>
-                    <a:pt x="2077053" y="2945326"/>
-                  </a:lnTo>
-                  <a:lnTo>
-                    <a:pt x="2148675" y="2936715"/>
-                  </a:lnTo>
-                  <a:lnTo>
-                    <a:pt x="2220298" y="2928000"/>
-                  </a:lnTo>
-                  <a:lnTo>
-                    <a:pt x="2291920" y="2919179"/>
-                  </a:lnTo>
-                  <a:lnTo>
-                    <a:pt x="2363543" y="2910250"/>
-                  </a:lnTo>
-                  <a:lnTo>
-                    <a:pt x="2435165" y="2901213"/>
-                  </a:lnTo>
-                  <a:lnTo>
-                    <a:pt x="2506788" y="2892066"/>
-                  </a:lnTo>
-                  <a:lnTo>
-                    <a:pt x="2578410" y="2882807"/>
-                  </a:lnTo>
-                  <a:lnTo>
-                    <a:pt x="2650033" y="2873436"/>
-                  </a:lnTo>
-                  <a:lnTo>
-                    <a:pt x="2721655" y="2863950"/>
-                  </a:lnTo>
-                  <a:lnTo>
-                    <a:pt x="2793278" y="2854349"/>
-                  </a:lnTo>
-                  <a:lnTo>
-                    <a:pt x="2864901" y="2844632"/>
-                  </a:lnTo>
-                  <a:lnTo>
-                    <a:pt x="2936523" y="2834796"/>
-                  </a:lnTo>
-                  <a:lnTo>
-                    <a:pt x="3008146" y="2824840"/>
-                  </a:lnTo>
-                  <a:lnTo>
-                    <a:pt x="3079768" y="2814763"/>
-                  </a:lnTo>
-                  <a:lnTo>
-                    <a:pt x="3151391" y="2804563"/>
-                  </a:lnTo>
-                  <a:lnTo>
-                    <a:pt x="3223013" y="2794239"/>
-                  </a:lnTo>
-                  <a:lnTo>
-                    <a:pt x="3294636" y="2783790"/>
-                  </a:lnTo>
-                  <a:lnTo>
-                    <a:pt x="3366258" y="2732045"/>
-                  </a:lnTo>
-                  <a:lnTo>
-                    <a:pt x="3437881" y="2673420"/>
-                  </a:lnTo>
-                  <a:lnTo>
-                    <a:pt x="3509503" y="2611062"/>
-                  </a:lnTo>
-                  <a:lnTo>
-                    <a:pt x="3581126" y="2544733"/>
-                  </a:lnTo>
-                  <a:lnTo>
-                    <a:pt x="3652748" y="2474180"/>
-                  </a:lnTo>
-                  <a:lnTo>
-                    <a:pt x="3724371" y="2399134"/>
-                  </a:lnTo>
-                  <a:lnTo>
-                    <a:pt x="3795993" y="2319308"/>
-                  </a:lnTo>
-                  <a:lnTo>
-                    <a:pt x="3867616" y="2234400"/>
-                  </a:lnTo>
-                  <a:lnTo>
-                    <a:pt x="3939238" y="2144085"/>
-                  </a:lnTo>
-                  <a:lnTo>
-                    <a:pt x="4010861" y="2048018"/>
-                  </a:lnTo>
-                  <a:lnTo>
-                    <a:pt x="4082483" y="1945833"/>
-                  </a:lnTo>
-                  <a:lnTo>
-                    <a:pt x="4154106" y="1837142"/>
-                  </a:lnTo>
-                  <a:lnTo>
-                    <a:pt x="4225729" y="1721528"/>
-                  </a:lnTo>
-                  <a:lnTo>
-                    <a:pt x="4297351" y="1598553"/>
-                  </a:lnTo>
-                  <a:lnTo>
-                    <a:pt x="4368974" y="1467746"/>
-                  </a:lnTo>
-                  <a:lnTo>
-                    <a:pt x="4440596" y="1328609"/>
-                  </a:lnTo>
-                  <a:lnTo>
-                    <a:pt x="4512219" y="1180611"/>
-                  </a:lnTo>
-                  <a:lnTo>
-                    <a:pt x="4583841" y="1023189"/>
-                  </a:lnTo>
-                  <a:lnTo>
-                    <a:pt x="4655464" y="855742"/>
-                  </a:lnTo>
-                  <a:lnTo>
-                    <a:pt x="4727086" y="677632"/>
-                  </a:lnTo>
-                  <a:lnTo>
-                    <a:pt x="4798709" y="488180"/>
-                  </a:lnTo>
-                  <a:lnTo>
-                    <a:pt x="4870331" y="286663"/>
-                  </a:lnTo>
-                  <a:lnTo>
-                    <a:pt x="4941954" y="72314"/>
-                  </a:lnTo>
-                  <a:lnTo>
-                    <a:pt x="4964670" y="0"/>
+                    <a:pt x="71622" y="3145438"/>
+                  </a:lnTo>
+                  <a:lnTo>
+                    <a:pt x="143245" y="3139319"/>
+                  </a:lnTo>
+                  <a:lnTo>
+                    <a:pt x="214867" y="3133125"/>
+                  </a:lnTo>
+                  <a:lnTo>
+                    <a:pt x="286490" y="3126857"/>
+                  </a:lnTo>
+                  <a:lnTo>
+                    <a:pt x="358112" y="3120513"/>
+                  </a:lnTo>
+                  <a:lnTo>
+                    <a:pt x="429735" y="3114093"/>
+                  </a:lnTo>
+                  <a:lnTo>
+                    <a:pt x="501357" y="3107595"/>
+                  </a:lnTo>
+                  <a:lnTo>
+                    <a:pt x="572980" y="3101019"/>
+                  </a:lnTo>
+                  <a:lnTo>
+                    <a:pt x="644602" y="3094364"/>
+                  </a:lnTo>
+                  <a:lnTo>
+                    <a:pt x="716225" y="3087628"/>
+                  </a:lnTo>
+                  <a:lnTo>
+                    <a:pt x="787847" y="3080811"/>
+                  </a:lnTo>
+                  <a:lnTo>
+                    <a:pt x="859470" y="3073912"/>
+                  </a:lnTo>
+                  <a:lnTo>
+                    <a:pt x="931092" y="3066929"/>
+                  </a:lnTo>
+                  <a:lnTo>
+                    <a:pt x="1002715" y="3059862"/>
+                  </a:lnTo>
+                  <a:lnTo>
+                    <a:pt x="1074337" y="3052710"/>
+                  </a:lnTo>
+                  <a:lnTo>
+                    <a:pt x="1145960" y="3045472"/>
+                  </a:lnTo>
+                  <a:lnTo>
+                    <a:pt x="1217582" y="3038146"/>
+                  </a:lnTo>
+                  <a:lnTo>
+                    <a:pt x="1289205" y="3030732"/>
+                  </a:lnTo>
+                  <a:lnTo>
+                    <a:pt x="1360827" y="3023229"/>
+                  </a:lnTo>
+                  <a:lnTo>
+                    <a:pt x="1432450" y="3015635"/>
+                  </a:lnTo>
+                  <a:lnTo>
+                    <a:pt x="1504073" y="3007949"/>
+                  </a:lnTo>
+                  <a:lnTo>
+                    <a:pt x="1575695" y="3000171"/>
+                  </a:lnTo>
+                  <a:lnTo>
+                    <a:pt x="1647318" y="2992299"/>
+                  </a:lnTo>
+                  <a:lnTo>
+                    <a:pt x="1718940" y="2984331"/>
+                  </a:lnTo>
+                  <a:lnTo>
+                    <a:pt x="1790563" y="2976268"/>
+                  </a:lnTo>
+                  <a:lnTo>
+                    <a:pt x="1862185" y="2968108"/>
+                  </a:lnTo>
+                  <a:lnTo>
+                    <a:pt x="1933808" y="2959848"/>
+                  </a:lnTo>
+                  <a:lnTo>
+                    <a:pt x="2005430" y="2951490"/>
+                  </a:lnTo>
+                  <a:lnTo>
+                    <a:pt x="2077053" y="2943030"/>
+                  </a:lnTo>
+                  <a:lnTo>
+                    <a:pt x="2148675" y="2934469"/>
+                  </a:lnTo>
+                  <a:lnTo>
+                    <a:pt x="2220298" y="2925804"/>
+                  </a:lnTo>
+                  <a:lnTo>
+                    <a:pt x="2291920" y="2917034"/>
+                  </a:lnTo>
+                  <a:lnTo>
+                    <a:pt x="2363543" y="2908159"/>
+                  </a:lnTo>
+                  <a:lnTo>
+                    <a:pt x="2435165" y="2899176"/>
+                  </a:lnTo>
+                  <a:lnTo>
+                    <a:pt x="2506788" y="2890086"/>
+                  </a:lnTo>
+                  <a:lnTo>
+                    <a:pt x="2578410" y="2880885"/>
+                  </a:lnTo>
+                  <a:lnTo>
+                    <a:pt x="2650033" y="2871574"/>
+                  </a:lnTo>
+                  <a:lnTo>
+                    <a:pt x="2721655" y="2862150"/>
+                  </a:lnTo>
+                  <a:lnTo>
+                    <a:pt x="2793278" y="2852613"/>
+                  </a:lnTo>
+                  <a:lnTo>
+                    <a:pt x="2864901" y="2842960"/>
+                  </a:lnTo>
+                  <a:lnTo>
+                    <a:pt x="2936523" y="2833191"/>
+                  </a:lnTo>
+                  <a:lnTo>
+                    <a:pt x="3008146" y="2823304"/>
+                  </a:lnTo>
+                  <a:lnTo>
+                    <a:pt x="3079768" y="2813298"/>
+                  </a:lnTo>
+                  <a:lnTo>
+                    <a:pt x="3151391" y="2803171"/>
+                  </a:lnTo>
+                  <a:lnTo>
+                    <a:pt x="3223013" y="2792922"/>
+                  </a:lnTo>
+                  <a:lnTo>
+                    <a:pt x="3294636" y="2780814"/>
+                  </a:lnTo>
+                  <a:lnTo>
+                    <a:pt x="3366258" y="2725183"/>
+                  </a:lnTo>
+                  <a:lnTo>
+                    <a:pt x="3437881" y="2666002"/>
+                  </a:lnTo>
+                  <a:lnTo>
+                    <a:pt x="3509503" y="2603044"/>
+                  </a:lnTo>
+                  <a:lnTo>
+                    <a:pt x="3581126" y="2536069"/>
+                  </a:lnTo>
+                  <a:lnTo>
+                    <a:pt x="3652748" y="2464821"/>
+                  </a:lnTo>
+                  <a:lnTo>
+                    <a:pt x="3724371" y="2389026"/>
+                  </a:lnTo>
+                  <a:lnTo>
+                    <a:pt x="3795993" y="2308394"/>
+                  </a:lnTo>
+                  <a:lnTo>
+                    <a:pt x="3867616" y="2222617"/>
+                  </a:lnTo>
+                  <a:lnTo>
+                    <a:pt x="3939238" y="2131367"/>
+                  </a:lnTo>
+                  <a:lnTo>
+                    <a:pt x="4010861" y="2034295"/>
+                  </a:lnTo>
+                  <a:lnTo>
+                    <a:pt x="4082483" y="1931028"/>
+                  </a:lnTo>
+                  <a:lnTo>
+                    <a:pt x="4154106" y="1821172"/>
+                  </a:lnTo>
+                  <a:lnTo>
+                    <a:pt x="4225729" y="1704305"/>
+                  </a:lnTo>
+                  <a:lnTo>
+                    <a:pt x="4297351" y="1579982"/>
+                  </a:lnTo>
+                  <a:lnTo>
+                    <a:pt x="4368974" y="1447725"/>
+                  </a:lnTo>
+                  <a:lnTo>
+                    <a:pt x="4440596" y="1307029"/>
+                  </a:lnTo>
+                  <a:lnTo>
+                    <a:pt x="4512219" y="1157356"/>
+                  </a:lnTo>
+                  <a:lnTo>
+                    <a:pt x="4583841" y="998131"/>
+                  </a:lnTo>
+                  <a:lnTo>
+                    <a:pt x="4655464" y="828747"/>
+                  </a:lnTo>
+                  <a:lnTo>
+                    <a:pt x="4727086" y="648554"/>
+                  </a:lnTo>
+                  <a:lnTo>
+                    <a:pt x="4798709" y="456863"/>
+                  </a:lnTo>
+                  <a:lnTo>
+                    <a:pt x="4870331" y="252940"/>
+                  </a:lnTo>
+                  <a:lnTo>
+                    <a:pt x="4941954" y="36005"/>
+                  </a:lnTo>
+                  <a:lnTo>
+                    <a:pt x="4953128" y="0"/>
                   </a:lnTo>
                   <a:lnTo>
                     <a:pt x="7090630" y="0"/>
                   </a:lnTo>
                   <a:lnTo>
-                    <a:pt x="7090630" y="2002762"/>
-                  </a:lnTo>
-                  <a:lnTo>
-                    <a:pt x="7019007" y="2022604"/>
-                  </a:lnTo>
-                  <a:lnTo>
-                    <a:pt x="6947385" y="2042209"/>
-                  </a:lnTo>
-                  <a:lnTo>
-                    <a:pt x="6875762" y="2061577"/>
-                  </a:lnTo>
-                  <a:lnTo>
-                    <a:pt x="6804139" y="2080712"/>
-                  </a:lnTo>
-                  <a:lnTo>
-                    <a:pt x="6732517" y="2099618"/>
-                  </a:lnTo>
-                  <a:lnTo>
-                    <a:pt x="6660894" y="2118296"/>
-                  </a:lnTo>
-                  <a:lnTo>
-                    <a:pt x="6589272" y="2136749"/>
-                  </a:lnTo>
-                  <a:lnTo>
-                    <a:pt x="6517649" y="2154980"/>
-                  </a:lnTo>
-                  <a:lnTo>
-                    <a:pt x="6446027" y="2172992"/>
-                  </a:lnTo>
-                  <a:lnTo>
-                    <a:pt x="6374404" y="2190788"/>
-                  </a:lnTo>
-                  <a:lnTo>
-                    <a:pt x="6302782" y="2208369"/>
-                  </a:lnTo>
-                  <a:lnTo>
-                    <a:pt x="6231159" y="2225739"/>
-                  </a:lnTo>
-                  <a:lnTo>
-                    <a:pt x="6159537" y="2242900"/>
-                  </a:lnTo>
-                  <a:lnTo>
-                    <a:pt x="6087914" y="2259855"/>
-                  </a:lnTo>
-                  <a:lnTo>
-                    <a:pt x="6016292" y="2276606"/>
-                  </a:lnTo>
-                  <a:lnTo>
-                    <a:pt x="5944669" y="2293155"/>
-                  </a:lnTo>
-                  <a:lnTo>
-                    <a:pt x="5873047" y="2309505"/>
-                  </a:lnTo>
-                  <a:lnTo>
-                    <a:pt x="5801424" y="2325659"/>
-                  </a:lnTo>
-                  <a:lnTo>
-                    <a:pt x="5729802" y="2341618"/>
-                  </a:lnTo>
-                  <a:lnTo>
-                    <a:pt x="5658179" y="2357386"/>
-                  </a:lnTo>
-                  <a:lnTo>
-                    <a:pt x="5586557" y="2372964"/>
-                  </a:lnTo>
-                  <a:lnTo>
-                    <a:pt x="5514934" y="2388354"/>
-                  </a:lnTo>
-                  <a:lnTo>
-                    <a:pt x="5443311" y="2403559"/>
-                  </a:lnTo>
-                  <a:lnTo>
-                    <a:pt x="5371689" y="2418582"/>
-                  </a:lnTo>
-                  <a:lnTo>
-                    <a:pt x="5300066" y="2433424"/>
-                  </a:lnTo>
-                  <a:lnTo>
-                    <a:pt x="5228444" y="2448087"/>
-                  </a:lnTo>
-                  <a:lnTo>
-                    <a:pt x="5156821" y="2462574"/>
-                  </a:lnTo>
-                  <a:lnTo>
-                    <a:pt x="5085199" y="2476887"/>
-                  </a:lnTo>
-                  <a:lnTo>
-                    <a:pt x="5013576" y="2491027"/>
-                  </a:lnTo>
-                  <a:lnTo>
-                    <a:pt x="4941954" y="2504998"/>
-                  </a:lnTo>
-                  <a:lnTo>
-                    <a:pt x="4870331" y="2518800"/>
-                  </a:lnTo>
-                  <a:lnTo>
-                    <a:pt x="4798709" y="2532437"/>
-                  </a:lnTo>
-                  <a:lnTo>
-                    <a:pt x="4727086" y="2545909"/>
-                  </a:lnTo>
-                  <a:lnTo>
-                    <a:pt x="4655464" y="2559220"/>
-                  </a:lnTo>
-                  <a:lnTo>
-                    <a:pt x="4583841" y="2572370"/>
-                  </a:lnTo>
-                  <a:lnTo>
-                    <a:pt x="4512219" y="2585362"/>
-                  </a:lnTo>
-                  <a:lnTo>
-                    <a:pt x="4440596" y="2598198"/>
-                  </a:lnTo>
-                  <a:lnTo>
-                    <a:pt x="4368974" y="2610880"/>
-                  </a:lnTo>
-                  <a:lnTo>
-                    <a:pt x="4297351" y="2623409"/>
-                  </a:lnTo>
-                  <a:lnTo>
-                    <a:pt x="4225729" y="2635787"/>
-                  </a:lnTo>
-                  <a:lnTo>
-                    <a:pt x="4154106" y="2648017"/>
-                  </a:lnTo>
-                  <a:lnTo>
-                    <a:pt x="4082483" y="2660099"/>
-                  </a:lnTo>
-                  <a:lnTo>
-                    <a:pt x="4010861" y="2672036"/>
-                  </a:lnTo>
-                  <a:lnTo>
-                    <a:pt x="3939238" y="2683830"/>
-                  </a:lnTo>
-                  <a:lnTo>
-                    <a:pt x="3867616" y="2695482"/>
-                  </a:lnTo>
-                  <a:lnTo>
-                    <a:pt x="3795993" y="2706993"/>
-                  </a:lnTo>
-                  <a:lnTo>
-                    <a:pt x="3724371" y="2718366"/>
-                  </a:lnTo>
-                  <a:lnTo>
-                    <a:pt x="3652748" y="2729603"/>
-                  </a:lnTo>
-                  <a:lnTo>
-                    <a:pt x="3581126" y="2740704"/>
-                  </a:lnTo>
-                  <a:lnTo>
-                    <a:pt x="3509503" y="2751672"/>
-                  </a:lnTo>
-                  <a:lnTo>
-                    <a:pt x="3437881" y="2762507"/>
-                  </a:lnTo>
-                  <a:lnTo>
-                    <a:pt x="3366258" y="2773213"/>
-                  </a:lnTo>
-                  <a:lnTo>
-                    <a:pt x="3294636" y="2787160"/>
-                  </a:lnTo>
-                  <a:lnTo>
-                    <a:pt x="3223013" y="2838975"/>
-                  </a:lnTo>
-                  <a:lnTo>
-                    <a:pt x="3151391" y="2887688"/>
-                  </a:lnTo>
-                  <a:lnTo>
-                    <a:pt x="3079768" y="2933485"/>
-                  </a:lnTo>
-                  <a:lnTo>
-                    <a:pt x="3008146" y="2976540"/>
-                  </a:lnTo>
-                  <a:lnTo>
-                    <a:pt x="2936523" y="3017018"/>
-                  </a:lnTo>
-                  <a:lnTo>
-                    <a:pt x="2864901" y="3055072"/>
-                  </a:lnTo>
-                  <a:lnTo>
-                    <a:pt x="2793278" y="3090848"/>
-                  </a:lnTo>
-                  <a:lnTo>
-                    <a:pt x="2721655" y="3124482"/>
-                  </a:lnTo>
-                  <a:lnTo>
-                    <a:pt x="2650033" y="3156102"/>
-                  </a:lnTo>
-                  <a:lnTo>
-                    <a:pt x="2578410" y="3185829"/>
-                  </a:lnTo>
-                  <a:lnTo>
-                    <a:pt x="2506788" y="3213777"/>
-                  </a:lnTo>
-                  <a:lnTo>
-                    <a:pt x="2435165" y="3240051"/>
-                  </a:lnTo>
-                  <a:lnTo>
-                    <a:pt x="2363543" y="3264753"/>
-                  </a:lnTo>
-                  <a:lnTo>
-                    <a:pt x="2291920" y="3287975"/>
-                  </a:lnTo>
-                  <a:lnTo>
-                    <a:pt x="2220298" y="3309807"/>
-                  </a:lnTo>
-                  <a:lnTo>
-                    <a:pt x="2148675" y="3330332"/>
-                  </a:lnTo>
-                  <a:lnTo>
-                    <a:pt x="2077053" y="3349629"/>
-                  </a:lnTo>
-                  <a:lnTo>
-                    <a:pt x="2005430" y="3367770"/>
-                  </a:lnTo>
-                  <a:lnTo>
-                    <a:pt x="1933808" y="3384825"/>
-                  </a:lnTo>
-                  <a:lnTo>
-                    <a:pt x="1862185" y="3400859"/>
-                  </a:lnTo>
-                  <a:lnTo>
-                    <a:pt x="1790563" y="3415933"/>
-                  </a:lnTo>
-                  <a:lnTo>
-                    <a:pt x="1718940" y="3430104"/>
-                  </a:lnTo>
-                  <a:lnTo>
-                    <a:pt x="1647318" y="3443427"/>
-                  </a:lnTo>
-                  <a:lnTo>
-                    <a:pt x="1575695" y="3455953"/>
-                  </a:lnTo>
-                  <a:lnTo>
-                    <a:pt x="1504073" y="3467729"/>
-                  </a:lnTo>
-                  <a:lnTo>
-                    <a:pt x="1432450" y="3478799"/>
-                  </a:lnTo>
-                  <a:lnTo>
-                    <a:pt x="1360827" y="3489207"/>
-                  </a:lnTo>
-                  <a:lnTo>
-                    <a:pt x="1289205" y="3498992"/>
-                  </a:lnTo>
-                  <a:lnTo>
-                    <a:pt x="1217582" y="3508191"/>
-                  </a:lnTo>
-                  <a:lnTo>
-                    <a:pt x="1145960" y="3516839"/>
-                  </a:lnTo>
-                  <a:lnTo>
-                    <a:pt x="1074337" y="3524969"/>
-                  </a:lnTo>
-                  <a:lnTo>
-                    <a:pt x="1002715" y="3532613"/>
-                  </a:lnTo>
-                  <a:lnTo>
-                    <a:pt x="931092" y="3539799"/>
-                  </a:lnTo>
-                  <a:lnTo>
-                    <a:pt x="859470" y="3546555"/>
-                  </a:lnTo>
-                  <a:lnTo>
-                    <a:pt x="787847" y="3552906"/>
-                  </a:lnTo>
-                  <a:lnTo>
-                    <a:pt x="716225" y="3558877"/>
-                  </a:lnTo>
-                  <a:lnTo>
-                    <a:pt x="644602" y="3564491"/>
-                  </a:lnTo>
-                  <a:lnTo>
-                    <a:pt x="572980" y="3569769"/>
-                  </a:lnTo>
-                  <a:lnTo>
-                    <a:pt x="501357" y="3574730"/>
-                  </a:lnTo>
-                  <a:lnTo>
-                    <a:pt x="429735" y="3579395"/>
-                  </a:lnTo>
-                  <a:lnTo>
-                    <a:pt x="358112" y="3583780"/>
-                  </a:lnTo>
-                  <a:lnTo>
-                    <a:pt x="286490" y="3587903"/>
-                  </a:lnTo>
-                  <a:lnTo>
-                    <a:pt x="214867" y="3591779"/>
-                  </a:lnTo>
-                  <a:lnTo>
-                    <a:pt x="143245" y="3595423"/>
-                  </a:lnTo>
-                  <a:lnTo>
-                    <a:pt x="71622" y="3598848"/>
-                  </a:lnTo>
-                  <a:lnTo>
-                    <a:pt x="0" y="3602069"/>
+                    <a:pt x="7090630" y="2009723"/>
+                  </a:lnTo>
+                  <a:lnTo>
+                    <a:pt x="7019007" y="2029309"/>
+                  </a:lnTo>
+                  <a:lnTo>
+                    <a:pt x="6947385" y="2048661"/>
+                  </a:lnTo>
+                  <a:lnTo>
+                    <a:pt x="6875762" y="2067783"/>
+                  </a:lnTo>
+                  <a:lnTo>
+                    <a:pt x="6804139" y="2086677"/>
+                  </a:lnTo>
+                  <a:lnTo>
+                    <a:pt x="6732517" y="2105345"/>
+                  </a:lnTo>
+                  <a:lnTo>
+                    <a:pt x="6660894" y="2123791"/>
+                  </a:lnTo>
+                  <a:lnTo>
+                    <a:pt x="6589272" y="2142017"/>
+                  </a:lnTo>
+                  <a:lnTo>
+                    <a:pt x="6517649" y="2160026"/>
+                  </a:lnTo>
+                  <a:lnTo>
+                    <a:pt x="6446027" y="2177820"/>
+                  </a:lnTo>
+                  <a:lnTo>
+                    <a:pt x="6374404" y="2195402"/>
+                  </a:lnTo>
+                  <a:lnTo>
+                    <a:pt x="6302782" y="2212774"/>
+                  </a:lnTo>
+                  <a:lnTo>
+                    <a:pt x="6231159" y="2229939"/>
+                  </a:lnTo>
+                  <a:lnTo>
+                    <a:pt x="6159537" y="2246900"/>
+                  </a:lnTo>
+                  <a:lnTo>
+                    <a:pt x="6087914" y="2263658"/>
+                  </a:lnTo>
+                  <a:lnTo>
+                    <a:pt x="6016292" y="2280217"/>
+                  </a:lnTo>
+                  <a:lnTo>
+                    <a:pt x="5944669" y="2296578"/>
+                  </a:lnTo>
+                  <a:lnTo>
+                    <a:pt x="5873047" y="2312744"/>
+                  </a:lnTo>
+                  <a:lnTo>
+                    <a:pt x="5801424" y="2328718"/>
+                  </a:lnTo>
+                  <a:lnTo>
+                    <a:pt x="5729802" y="2344501"/>
+                  </a:lnTo>
+                  <a:lnTo>
+                    <a:pt x="5658179" y="2360096"/>
+                  </a:lnTo>
+                  <a:lnTo>
+                    <a:pt x="5586557" y="2375505"/>
+                  </a:lnTo>
+                  <a:lnTo>
+                    <a:pt x="5514934" y="2390730"/>
+                  </a:lnTo>
+                  <a:lnTo>
+                    <a:pt x="5443311" y="2405774"/>
+                  </a:lnTo>
+                  <a:lnTo>
+                    <a:pt x="5371689" y="2420638"/>
+                  </a:lnTo>
+                  <a:lnTo>
+                    <a:pt x="5300066" y="2435325"/>
+                  </a:lnTo>
+                  <a:lnTo>
+                    <a:pt x="5228444" y="2449837"/>
+                  </a:lnTo>
+                  <a:lnTo>
+                    <a:pt x="5156821" y="2464176"/>
+                  </a:lnTo>
+                  <a:lnTo>
+                    <a:pt x="5085199" y="2478345"/>
+                  </a:lnTo>
+                  <a:lnTo>
+                    <a:pt x="5013576" y="2492344"/>
+                  </a:lnTo>
+                  <a:lnTo>
+                    <a:pt x="4941954" y="2506176"/>
+                  </a:lnTo>
+                  <a:lnTo>
+                    <a:pt x="4870331" y="2519844"/>
+                  </a:lnTo>
+                  <a:lnTo>
+                    <a:pt x="4798709" y="2533348"/>
+                  </a:lnTo>
+                  <a:lnTo>
+                    <a:pt x="4727086" y="2546692"/>
+                  </a:lnTo>
+                  <a:lnTo>
+                    <a:pt x="4655464" y="2559876"/>
+                  </a:lnTo>
+                  <a:lnTo>
+                    <a:pt x="4583841" y="2572904"/>
+                  </a:lnTo>
+                  <a:lnTo>
+                    <a:pt x="4512219" y="2585776"/>
+                  </a:lnTo>
+                  <a:lnTo>
+                    <a:pt x="4440596" y="2598494"/>
+                  </a:lnTo>
+                  <a:lnTo>
+                    <a:pt x="4368974" y="2611061"/>
+                  </a:lnTo>
+                  <a:lnTo>
+                    <a:pt x="4297351" y="2623478"/>
+                  </a:lnTo>
+                  <a:lnTo>
+                    <a:pt x="4225729" y="2635747"/>
+                  </a:lnTo>
+                  <a:lnTo>
+                    <a:pt x="4154106" y="2647870"/>
+                  </a:lnTo>
+                  <a:lnTo>
+                    <a:pt x="4082483" y="2659848"/>
+                  </a:lnTo>
+                  <a:lnTo>
+                    <a:pt x="4010861" y="2671684"/>
+                  </a:lnTo>
+                  <a:lnTo>
+                    <a:pt x="3939238" y="2683378"/>
+                  </a:lnTo>
+                  <a:lnTo>
+                    <a:pt x="3867616" y="2694933"/>
+                  </a:lnTo>
+                  <a:lnTo>
+                    <a:pt x="3795993" y="2706350"/>
+                  </a:lnTo>
+                  <a:lnTo>
+                    <a:pt x="3724371" y="2717631"/>
+                  </a:lnTo>
+                  <a:lnTo>
+                    <a:pt x="3652748" y="2728778"/>
+                  </a:lnTo>
+                  <a:lnTo>
+                    <a:pt x="3581126" y="2739792"/>
+                  </a:lnTo>
+                  <a:lnTo>
+                    <a:pt x="3509503" y="2750674"/>
+                  </a:lnTo>
+                  <a:lnTo>
+                    <a:pt x="3437881" y="2761427"/>
+                  </a:lnTo>
+                  <a:lnTo>
+                    <a:pt x="3366258" y="2772052"/>
+                  </a:lnTo>
+                  <a:lnTo>
+                    <a:pt x="3294636" y="2782549"/>
+                  </a:lnTo>
+                  <a:lnTo>
+                    <a:pt x="3223013" y="2833109"/>
+                  </a:lnTo>
+                  <a:lnTo>
+                    <a:pt x="3151391" y="2882267"/>
+                  </a:lnTo>
+                  <a:lnTo>
+                    <a:pt x="3079768" y="2928476"/>
+                  </a:lnTo>
+                  <a:lnTo>
+                    <a:pt x="3008146" y="2971913"/>
+                  </a:lnTo>
+                  <a:lnTo>
+                    <a:pt x="2936523" y="3012745"/>
+                  </a:lnTo>
+                  <a:lnTo>
+                    <a:pt x="2864901" y="3051128"/>
+                  </a:lnTo>
+                  <a:lnTo>
+                    <a:pt x="2793278" y="3087208"/>
+                  </a:lnTo>
+                  <a:lnTo>
+                    <a:pt x="2721655" y="3121125"/>
+                  </a:lnTo>
+                  <a:lnTo>
+                    <a:pt x="2650033" y="3153006"/>
+                  </a:lnTo>
+                  <a:lnTo>
+                    <a:pt x="2578410" y="3182976"/>
+                  </a:lnTo>
+                  <a:lnTo>
+                    <a:pt x="2506788" y="3211148"/>
+                  </a:lnTo>
+                  <a:lnTo>
+                    <a:pt x="2435165" y="3237630"/>
+                  </a:lnTo>
+                  <a:lnTo>
+                    <a:pt x="2363543" y="3262523"/>
+                  </a:lnTo>
+                  <a:lnTo>
+                    <a:pt x="2291920" y="3285924"/>
+                  </a:lnTo>
+                  <a:lnTo>
+                    <a:pt x="2220298" y="3307920"/>
+                  </a:lnTo>
+                  <a:lnTo>
+                    <a:pt x="2148675" y="3328598"/>
+                  </a:lnTo>
+                  <a:lnTo>
+                    <a:pt x="2077053" y="3348035"/>
+                  </a:lnTo>
+                  <a:lnTo>
+                    <a:pt x="2005430" y="3366306"/>
+                  </a:lnTo>
+                  <a:lnTo>
+                    <a:pt x="1933808" y="3383481"/>
+                  </a:lnTo>
+                  <a:lnTo>
+                    <a:pt x="1862185" y="3399626"/>
+                  </a:lnTo>
+                  <a:lnTo>
+                    <a:pt x="1790563" y="3414803"/>
+                  </a:lnTo>
+                  <a:lnTo>
+                    <a:pt x="1718940" y="3429069"/>
+                  </a:lnTo>
+                  <a:lnTo>
+                    <a:pt x="1647318" y="3442480"/>
+                  </a:lnTo>
+                  <a:lnTo>
+                    <a:pt x="1575695" y="3455086"/>
+                  </a:lnTo>
+                  <a:lnTo>
+                    <a:pt x="1504073" y="3466936"/>
+                  </a:lnTo>
+                  <a:lnTo>
+                    <a:pt x="1432450" y="3478075"/>
+                  </a:lnTo>
+                  <a:lnTo>
+                    <a:pt x="1360827" y="3488546"/>
+                  </a:lnTo>
+                  <a:lnTo>
+                    <a:pt x="1289205" y="3498389"/>
+                  </a:lnTo>
+                  <a:lnTo>
+                    <a:pt x="1217582" y="3507642"/>
+                  </a:lnTo>
+                  <a:lnTo>
+                    <a:pt x="1145960" y="3516339"/>
+                  </a:lnTo>
+                  <a:lnTo>
+                    <a:pt x="1074337" y="3524515"/>
+                  </a:lnTo>
+                  <a:lnTo>
+                    <a:pt x="1002715" y="3532201"/>
+                  </a:lnTo>
+                  <a:lnTo>
+                    <a:pt x="931092" y="3539425"/>
+                  </a:lnTo>
+                  <a:lnTo>
+                    <a:pt x="859470" y="3546216"/>
+                  </a:lnTo>
+                  <a:lnTo>
+                    <a:pt x="787847" y="3552600"/>
+                  </a:lnTo>
+                  <a:lnTo>
+                    <a:pt x="716225" y="3558601"/>
+                  </a:lnTo>
+                  <a:lnTo>
+                    <a:pt x="644602" y="3564242"/>
+                  </a:lnTo>
+                  <a:lnTo>
+                    <a:pt x="572980" y="3569544"/>
+                  </a:lnTo>
+                  <a:lnTo>
+                    <a:pt x="501357" y="3574529"/>
+                  </a:lnTo>
+                  <a:lnTo>
+                    <a:pt x="429735" y="3579214"/>
+                  </a:lnTo>
+                  <a:lnTo>
+                    <a:pt x="358112" y="3583619"/>
+                  </a:lnTo>
+                  <a:lnTo>
+                    <a:pt x="286490" y="3587759"/>
+                  </a:lnTo>
+                  <a:lnTo>
+                    <a:pt x="214867" y="3591651"/>
+                  </a:lnTo>
+                  <a:lnTo>
+                    <a:pt x="143245" y="3595309"/>
+                  </a:lnTo>
+                  <a:lnTo>
+                    <a:pt x="71622" y="3598748"/>
+                  </a:lnTo>
+                  <a:lnTo>
+                    <a:pt x="0" y="3601981"/>
                   </a:lnTo>
                   <a:close/>
                 </a:path>
@@ -3507,224 +3507,224 @@
           <p:spPr>
             <a:xfrm>
               <a:off x="1172049" y="1896563"/>
-              <a:ext cx="4964670" cy="3154649"/>
+              <a:ext cx="4953128" cy="3151485"/>
             </a:xfrm>
             <a:custGeom>
               <a:avLst/>
               <a:pathLst>
-                <a:path w="4964670" h="3154649">
+                <a:path w="4953128" h="3151485">
                   <a:moveTo>
-                    <a:pt x="0" y="3154649"/>
+                    <a:pt x="0" y="3151485"/>
                   </a:moveTo>
                   <a:lnTo>
-                    <a:pt x="71622" y="3148587"/>
-                  </a:lnTo>
-                  <a:lnTo>
-                    <a:pt x="143245" y="3142451"/>
-                  </a:lnTo>
-                  <a:lnTo>
-                    <a:pt x="214867" y="3136240"/>
-                  </a:lnTo>
-                  <a:lnTo>
-                    <a:pt x="286490" y="3129954"/>
-                  </a:lnTo>
-                  <a:lnTo>
-                    <a:pt x="358112" y="3123591"/>
-                  </a:lnTo>
-                  <a:lnTo>
-                    <a:pt x="429735" y="3117151"/>
-                  </a:lnTo>
-                  <a:lnTo>
-                    <a:pt x="501357" y="3110632"/>
-                  </a:lnTo>
-                  <a:lnTo>
-                    <a:pt x="572980" y="3104034"/>
-                  </a:lnTo>
-                  <a:lnTo>
-                    <a:pt x="644602" y="3097356"/>
-                  </a:lnTo>
-                  <a:lnTo>
-                    <a:pt x="716225" y="3090596"/>
-                  </a:lnTo>
-                  <a:lnTo>
-                    <a:pt x="787847" y="3083754"/>
-                  </a:lnTo>
-                  <a:lnTo>
-                    <a:pt x="859470" y="3076829"/>
-                  </a:lnTo>
-                  <a:lnTo>
-                    <a:pt x="931092" y="3069820"/>
-                  </a:lnTo>
-                  <a:lnTo>
-                    <a:pt x="1002715" y="3062725"/>
-                  </a:lnTo>
-                  <a:lnTo>
-                    <a:pt x="1074337" y="3055544"/>
-                  </a:lnTo>
-                  <a:lnTo>
-                    <a:pt x="1145960" y="3048275"/>
-                  </a:lnTo>
-                  <a:lnTo>
-                    <a:pt x="1217582" y="3040918"/>
-                  </a:lnTo>
-                  <a:lnTo>
-                    <a:pt x="1289205" y="3033471"/>
-                  </a:lnTo>
-                  <a:lnTo>
-                    <a:pt x="1360827" y="3025934"/>
-                  </a:lnTo>
-                  <a:lnTo>
-                    <a:pt x="1432450" y="3018305"/>
-                  </a:lnTo>
-                  <a:lnTo>
-                    <a:pt x="1504073" y="3010583"/>
-                  </a:lnTo>
-                  <a:lnTo>
-                    <a:pt x="1575695" y="3002767"/>
-                  </a:lnTo>
-                  <a:lnTo>
-                    <a:pt x="1647318" y="2994856"/>
-                  </a:lnTo>
-                  <a:lnTo>
-                    <a:pt x="1718940" y="2986849"/>
-                  </a:lnTo>
-                  <a:lnTo>
-                    <a:pt x="1790563" y="2978744"/>
-                  </a:lnTo>
-                  <a:lnTo>
-                    <a:pt x="1862185" y="2970540"/>
-                  </a:lnTo>
-                  <a:lnTo>
-                    <a:pt x="1933808" y="2962237"/>
-                  </a:lnTo>
-                  <a:lnTo>
-                    <a:pt x="2005430" y="2953833"/>
-                  </a:lnTo>
-                  <a:lnTo>
-                    <a:pt x="2077053" y="2945326"/>
-                  </a:lnTo>
-                  <a:lnTo>
-                    <a:pt x="2148675" y="2936715"/>
-                  </a:lnTo>
-                  <a:lnTo>
-                    <a:pt x="2220298" y="2928000"/>
-                  </a:lnTo>
-                  <a:lnTo>
-                    <a:pt x="2291920" y="2919179"/>
-                  </a:lnTo>
-                  <a:lnTo>
-                    <a:pt x="2363543" y="2910250"/>
-                  </a:lnTo>
-                  <a:lnTo>
-                    <a:pt x="2435165" y="2901213"/>
-                  </a:lnTo>
-                  <a:lnTo>
-                    <a:pt x="2506788" y="2892066"/>
-                  </a:lnTo>
-                  <a:lnTo>
-                    <a:pt x="2578410" y="2882807"/>
-                  </a:lnTo>
-                  <a:lnTo>
-                    <a:pt x="2650033" y="2873436"/>
-                  </a:lnTo>
-                  <a:lnTo>
-                    <a:pt x="2721655" y="2863950"/>
-                  </a:lnTo>
-                  <a:lnTo>
-                    <a:pt x="2793278" y="2854349"/>
-                  </a:lnTo>
-                  <a:lnTo>
-                    <a:pt x="2864901" y="2844632"/>
-                  </a:lnTo>
-                  <a:lnTo>
-                    <a:pt x="2936523" y="2834796"/>
-                  </a:lnTo>
-                  <a:lnTo>
-                    <a:pt x="3008146" y="2824840"/>
-                  </a:lnTo>
-                  <a:lnTo>
-                    <a:pt x="3079768" y="2814763"/>
-                  </a:lnTo>
-                  <a:lnTo>
-                    <a:pt x="3151391" y="2804563"/>
-                  </a:lnTo>
-                  <a:lnTo>
-                    <a:pt x="3223013" y="2794239"/>
-                  </a:lnTo>
-                  <a:lnTo>
-                    <a:pt x="3294636" y="2783790"/>
-                  </a:lnTo>
-                  <a:lnTo>
-                    <a:pt x="3366258" y="2732045"/>
-                  </a:lnTo>
-                  <a:lnTo>
-                    <a:pt x="3437881" y="2673420"/>
-                  </a:lnTo>
-                  <a:lnTo>
-                    <a:pt x="3509503" y="2611062"/>
-                  </a:lnTo>
-                  <a:lnTo>
-                    <a:pt x="3581126" y="2544733"/>
-                  </a:lnTo>
-                  <a:lnTo>
-                    <a:pt x="3652748" y="2474180"/>
-                  </a:lnTo>
-                  <a:lnTo>
-                    <a:pt x="3724371" y="2399134"/>
-                  </a:lnTo>
-                  <a:lnTo>
-                    <a:pt x="3795993" y="2319308"/>
-                  </a:lnTo>
-                  <a:lnTo>
-                    <a:pt x="3867616" y="2234400"/>
-                  </a:lnTo>
-                  <a:lnTo>
-                    <a:pt x="3939238" y="2144085"/>
-                  </a:lnTo>
-                  <a:lnTo>
-                    <a:pt x="4010861" y="2048018"/>
-                  </a:lnTo>
-                  <a:lnTo>
-                    <a:pt x="4082483" y="1945833"/>
-                  </a:lnTo>
-                  <a:lnTo>
-                    <a:pt x="4154106" y="1837142"/>
-                  </a:lnTo>
-                  <a:lnTo>
-                    <a:pt x="4225729" y="1721528"/>
-                  </a:lnTo>
-                  <a:lnTo>
-                    <a:pt x="4297351" y="1598553"/>
-                  </a:lnTo>
-                  <a:lnTo>
-                    <a:pt x="4368974" y="1467746"/>
-                  </a:lnTo>
-                  <a:lnTo>
-                    <a:pt x="4440596" y="1328609"/>
-                  </a:lnTo>
-                  <a:lnTo>
-                    <a:pt x="4512219" y="1180611"/>
-                  </a:lnTo>
-                  <a:lnTo>
-                    <a:pt x="4583841" y="1023189"/>
-                  </a:lnTo>
-                  <a:lnTo>
-                    <a:pt x="4655464" y="855742"/>
-                  </a:lnTo>
-                  <a:lnTo>
-                    <a:pt x="4727086" y="677632"/>
-                  </a:lnTo>
-                  <a:lnTo>
-                    <a:pt x="4798709" y="488180"/>
-                  </a:lnTo>
-                  <a:lnTo>
-                    <a:pt x="4870331" y="286663"/>
-                  </a:lnTo>
-                  <a:lnTo>
-                    <a:pt x="4941954" y="72314"/>
-                  </a:lnTo>
-                  <a:lnTo>
-                    <a:pt x="4964670" y="0"/>
+                    <a:pt x="71622" y="3145438"/>
+                  </a:lnTo>
+                  <a:lnTo>
+                    <a:pt x="143245" y="3139319"/>
+                  </a:lnTo>
+                  <a:lnTo>
+                    <a:pt x="214867" y="3133125"/>
+                  </a:lnTo>
+                  <a:lnTo>
+                    <a:pt x="286490" y="3126857"/>
+                  </a:lnTo>
+                  <a:lnTo>
+                    <a:pt x="358112" y="3120513"/>
+                  </a:lnTo>
+                  <a:lnTo>
+                    <a:pt x="429735" y="3114093"/>
+                  </a:lnTo>
+                  <a:lnTo>
+                    <a:pt x="501357" y="3107595"/>
+                  </a:lnTo>
+                  <a:lnTo>
+                    <a:pt x="572980" y="3101019"/>
+                  </a:lnTo>
+                  <a:lnTo>
+                    <a:pt x="644602" y="3094364"/>
+                  </a:lnTo>
+                  <a:lnTo>
+                    <a:pt x="716225" y="3087628"/>
+                  </a:lnTo>
+                  <a:lnTo>
+                    <a:pt x="787847" y="3080811"/>
+                  </a:lnTo>
+                  <a:lnTo>
+                    <a:pt x="859470" y="3073912"/>
+                  </a:lnTo>
+                  <a:lnTo>
+                    <a:pt x="931092" y="3066929"/>
+                  </a:lnTo>
+                  <a:lnTo>
+                    <a:pt x="1002715" y="3059862"/>
+                  </a:lnTo>
+                  <a:lnTo>
+                    <a:pt x="1074337" y="3052710"/>
+                  </a:lnTo>
+                  <a:lnTo>
+                    <a:pt x="1145960" y="3045472"/>
+                  </a:lnTo>
+                  <a:lnTo>
+                    <a:pt x="1217582" y="3038146"/>
+                  </a:lnTo>
+                  <a:lnTo>
+                    <a:pt x="1289205" y="3030732"/>
+                  </a:lnTo>
+                  <a:lnTo>
+                    <a:pt x="1360827" y="3023229"/>
+                  </a:lnTo>
+                  <a:lnTo>
+                    <a:pt x="1432450" y="3015635"/>
+                  </a:lnTo>
+                  <a:lnTo>
+                    <a:pt x="1504073" y="3007949"/>
+                  </a:lnTo>
+                  <a:lnTo>
+                    <a:pt x="1575695" y="3000171"/>
+                  </a:lnTo>
+                  <a:lnTo>
+                    <a:pt x="1647318" y="2992299"/>
+                  </a:lnTo>
+                  <a:lnTo>
+                    <a:pt x="1718940" y="2984331"/>
+                  </a:lnTo>
+                  <a:lnTo>
+                    <a:pt x="1790563" y="2976268"/>
+                  </a:lnTo>
+                  <a:lnTo>
+                    <a:pt x="1862185" y="2968108"/>
+                  </a:lnTo>
+                  <a:lnTo>
+                    <a:pt x="1933808" y="2959848"/>
+                  </a:lnTo>
+                  <a:lnTo>
+                    <a:pt x="2005430" y="2951490"/>
+                  </a:lnTo>
+                  <a:lnTo>
+                    <a:pt x="2077053" y="2943030"/>
+                  </a:lnTo>
+                  <a:lnTo>
+                    <a:pt x="2148675" y="2934469"/>
+                  </a:lnTo>
+                  <a:lnTo>
+                    <a:pt x="2220298" y="2925804"/>
+                  </a:lnTo>
+                  <a:lnTo>
+                    <a:pt x="2291920" y="2917034"/>
+                  </a:lnTo>
+                  <a:lnTo>
+                    <a:pt x="2363543" y="2908159"/>
+                  </a:lnTo>
+                  <a:lnTo>
+                    <a:pt x="2435165" y="2899176"/>
+                  </a:lnTo>
+                  <a:lnTo>
+                    <a:pt x="2506788" y="2890086"/>
+                  </a:lnTo>
+                  <a:lnTo>
+                    <a:pt x="2578410" y="2880885"/>
+                  </a:lnTo>
+                  <a:lnTo>
+                    <a:pt x="2650033" y="2871574"/>
+                  </a:lnTo>
+                  <a:lnTo>
+                    <a:pt x="2721655" y="2862150"/>
+                  </a:lnTo>
+                  <a:lnTo>
+                    <a:pt x="2793278" y="2852613"/>
+                  </a:lnTo>
+                  <a:lnTo>
+                    <a:pt x="2864901" y="2842960"/>
+                  </a:lnTo>
+                  <a:lnTo>
+                    <a:pt x="2936523" y="2833191"/>
+                  </a:lnTo>
+                  <a:lnTo>
+                    <a:pt x="3008146" y="2823304"/>
+                  </a:lnTo>
+                  <a:lnTo>
+                    <a:pt x="3079768" y="2813298"/>
+                  </a:lnTo>
+                  <a:lnTo>
+                    <a:pt x="3151391" y="2803171"/>
+                  </a:lnTo>
+                  <a:lnTo>
+                    <a:pt x="3223013" y="2792922"/>
+                  </a:lnTo>
+                  <a:lnTo>
+                    <a:pt x="3294636" y="2780814"/>
+                  </a:lnTo>
+                  <a:lnTo>
+                    <a:pt x="3366258" y="2725183"/>
+                  </a:lnTo>
+                  <a:lnTo>
+                    <a:pt x="3437881" y="2666002"/>
+                  </a:lnTo>
+                  <a:lnTo>
+                    <a:pt x="3509503" y="2603044"/>
+                  </a:lnTo>
+                  <a:lnTo>
+                    <a:pt x="3581126" y="2536069"/>
+                  </a:lnTo>
+                  <a:lnTo>
+                    <a:pt x="3652748" y="2464821"/>
+                  </a:lnTo>
+                  <a:lnTo>
+                    <a:pt x="3724371" y="2389026"/>
+                  </a:lnTo>
+                  <a:lnTo>
+                    <a:pt x="3795993" y="2308394"/>
+                  </a:lnTo>
+                  <a:lnTo>
+                    <a:pt x="3867616" y="2222617"/>
+                  </a:lnTo>
+                  <a:lnTo>
+                    <a:pt x="3939238" y="2131367"/>
+                  </a:lnTo>
+                  <a:lnTo>
+                    <a:pt x="4010861" y="2034295"/>
+                  </a:lnTo>
+                  <a:lnTo>
+                    <a:pt x="4082483" y="1931028"/>
+                  </a:lnTo>
+                  <a:lnTo>
+                    <a:pt x="4154106" y="1821172"/>
+                  </a:lnTo>
+                  <a:lnTo>
+                    <a:pt x="4225729" y="1704305"/>
+                  </a:lnTo>
+                  <a:lnTo>
+                    <a:pt x="4297351" y="1579982"/>
+                  </a:lnTo>
+                  <a:lnTo>
+                    <a:pt x="4368974" y="1447725"/>
+                  </a:lnTo>
+                  <a:lnTo>
+                    <a:pt x="4440596" y="1307029"/>
+                  </a:lnTo>
+                  <a:lnTo>
+                    <a:pt x="4512219" y="1157356"/>
+                  </a:lnTo>
+                  <a:lnTo>
+                    <a:pt x="4583841" y="998131"/>
+                  </a:lnTo>
+                  <a:lnTo>
+                    <a:pt x="4655464" y="828747"/>
+                  </a:lnTo>
+                  <a:lnTo>
+                    <a:pt x="4727086" y="648554"/>
+                  </a:lnTo>
+                  <a:lnTo>
+                    <a:pt x="4798709" y="456863"/>
+                  </a:lnTo>
+                  <a:lnTo>
+                    <a:pt x="4870331" y="252940"/>
+                  </a:lnTo>
+                  <a:lnTo>
+                    <a:pt x="4941954" y="36005"/>
+                  </a:lnTo>
+                  <a:lnTo>
+                    <a:pt x="4953128" y="0"/>
                   </a:lnTo>
                 </a:path>
               </a:pathLst>
@@ -3744,312 +3744,312 @@
           </p:nvSpPr>
           <p:spPr>
             <a:xfrm>
-              <a:off x="1172049" y="3899325"/>
-              <a:ext cx="7090630" cy="1599307"/>
+              <a:off x="1172049" y="3906286"/>
+              <a:ext cx="7090630" cy="1592258"/>
             </a:xfrm>
             <a:custGeom>
               <a:avLst/>
               <a:pathLst>
-                <a:path w="7090630" h="1599307">
+                <a:path w="7090630" h="1592258">
                   <a:moveTo>
                     <a:pt x="7090630" y="0"/>
                   </a:moveTo>
                   <a:lnTo>
-                    <a:pt x="7019007" y="19842"/>
-                  </a:lnTo>
-                  <a:lnTo>
-                    <a:pt x="6947385" y="39446"/>
-                  </a:lnTo>
-                  <a:lnTo>
-                    <a:pt x="6875762" y="58815"/>
-                  </a:lnTo>
-                  <a:lnTo>
-                    <a:pt x="6804139" y="77950"/>
-                  </a:lnTo>
-                  <a:lnTo>
-                    <a:pt x="6732517" y="96856"/>
-                  </a:lnTo>
-                  <a:lnTo>
-                    <a:pt x="6660894" y="115533"/>
-                  </a:lnTo>
-                  <a:lnTo>
-                    <a:pt x="6589272" y="133987"/>
-                  </a:lnTo>
-                  <a:lnTo>
-                    <a:pt x="6517649" y="152218"/>
-                  </a:lnTo>
-                  <a:lnTo>
-                    <a:pt x="6446027" y="170230"/>
-                  </a:lnTo>
-                  <a:lnTo>
-                    <a:pt x="6374404" y="188026"/>
-                  </a:lnTo>
-                  <a:lnTo>
-                    <a:pt x="6302782" y="205607"/>
-                  </a:lnTo>
-                  <a:lnTo>
-                    <a:pt x="6231159" y="222977"/>
-                  </a:lnTo>
-                  <a:lnTo>
-                    <a:pt x="6159537" y="240138"/>
-                  </a:lnTo>
-                  <a:lnTo>
-                    <a:pt x="6087914" y="257093"/>
-                  </a:lnTo>
-                  <a:lnTo>
-                    <a:pt x="6016292" y="273844"/>
-                  </a:lnTo>
-                  <a:lnTo>
-                    <a:pt x="5944669" y="290393"/>
-                  </a:lnTo>
-                  <a:lnTo>
-                    <a:pt x="5873047" y="306743"/>
-                  </a:lnTo>
-                  <a:lnTo>
-                    <a:pt x="5801424" y="322897"/>
-                  </a:lnTo>
-                  <a:lnTo>
-                    <a:pt x="5729802" y="338856"/>
-                  </a:lnTo>
-                  <a:lnTo>
-                    <a:pt x="5658179" y="354624"/>
-                  </a:lnTo>
-                  <a:lnTo>
-                    <a:pt x="5586557" y="370201"/>
-                  </a:lnTo>
-                  <a:lnTo>
-                    <a:pt x="5514934" y="385592"/>
-                  </a:lnTo>
-                  <a:lnTo>
-                    <a:pt x="5443311" y="400797"/>
-                  </a:lnTo>
-                  <a:lnTo>
-                    <a:pt x="5371689" y="415820"/>
-                  </a:lnTo>
-                  <a:lnTo>
-                    <a:pt x="5300066" y="430662"/>
-                  </a:lnTo>
-                  <a:lnTo>
-                    <a:pt x="5228444" y="445325"/>
-                  </a:lnTo>
-                  <a:lnTo>
-                    <a:pt x="5156821" y="459812"/>
-                  </a:lnTo>
-                  <a:lnTo>
-                    <a:pt x="5085199" y="474125"/>
-                  </a:lnTo>
-                  <a:lnTo>
-                    <a:pt x="5013576" y="488265"/>
-                  </a:lnTo>
-                  <a:lnTo>
-                    <a:pt x="4941954" y="502236"/>
-                  </a:lnTo>
-                  <a:lnTo>
-                    <a:pt x="4870331" y="516038"/>
-                  </a:lnTo>
-                  <a:lnTo>
-                    <a:pt x="4798709" y="529675"/>
-                  </a:lnTo>
-                  <a:lnTo>
-                    <a:pt x="4727086" y="543147"/>
-                  </a:lnTo>
-                  <a:lnTo>
-                    <a:pt x="4655464" y="556458"/>
-                  </a:lnTo>
-                  <a:lnTo>
-                    <a:pt x="4583841" y="569608"/>
-                  </a:lnTo>
-                  <a:lnTo>
-                    <a:pt x="4512219" y="582600"/>
-                  </a:lnTo>
-                  <a:lnTo>
-                    <a:pt x="4440596" y="595436"/>
-                  </a:lnTo>
-                  <a:lnTo>
-                    <a:pt x="4368974" y="608118"/>
-                  </a:lnTo>
-                  <a:lnTo>
-                    <a:pt x="4297351" y="620647"/>
-                  </a:lnTo>
-                  <a:lnTo>
-                    <a:pt x="4225729" y="633025"/>
-                  </a:lnTo>
-                  <a:lnTo>
-                    <a:pt x="4154106" y="645255"/>
-                  </a:lnTo>
-                  <a:lnTo>
-                    <a:pt x="4082483" y="657337"/>
-                  </a:lnTo>
-                  <a:lnTo>
-                    <a:pt x="4010861" y="669274"/>
-                  </a:lnTo>
-                  <a:lnTo>
-                    <a:pt x="3939238" y="681068"/>
-                  </a:lnTo>
-                  <a:lnTo>
-                    <a:pt x="3867616" y="692720"/>
-                  </a:lnTo>
-                  <a:lnTo>
-                    <a:pt x="3795993" y="704231"/>
-                  </a:lnTo>
-                  <a:lnTo>
-                    <a:pt x="3724371" y="715604"/>
-                  </a:lnTo>
-                  <a:lnTo>
-                    <a:pt x="3652748" y="726841"/>
-                  </a:lnTo>
-                  <a:lnTo>
-                    <a:pt x="3581126" y="737942"/>
-                  </a:lnTo>
-                  <a:lnTo>
-                    <a:pt x="3509503" y="748910"/>
-                  </a:lnTo>
-                  <a:lnTo>
-                    <a:pt x="3437881" y="759745"/>
-                  </a:lnTo>
-                  <a:lnTo>
-                    <a:pt x="3366258" y="770451"/>
-                  </a:lnTo>
-                  <a:lnTo>
-                    <a:pt x="3294636" y="784398"/>
-                  </a:lnTo>
-                  <a:lnTo>
-                    <a:pt x="3223013" y="836213"/>
-                  </a:lnTo>
-                  <a:lnTo>
-                    <a:pt x="3151391" y="884926"/>
-                  </a:lnTo>
-                  <a:lnTo>
-                    <a:pt x="3079768" y="930723"/>
-                  </a:lnTo>
-                  <a:lnTo>
-                    <a:pt x="3008146" y="973778"/>
-                  </a:lnTo>
-                  <a:lnTo>
-                    <a:pt x="2936523" y="1014256"/>
-                  </a:lnTo>
-                  <a:lnTo>
-                    <a:pt x="2864901" y="1052310"/>
-                  </a:lnTo>
-                  <a:lnTo>
-                    <a:pt x="2793278" y="1088086"/>
-                  </a:lnTo>
-                  <a:lnTo>
-                    <a:pt x="2721655" y="1121720"/>
-                  </a:lnTo>
-                  <a:lnTo>
-                    <a:pt x="2650033" y="1153340"/>
-                  </a:lnTo>
-                  <a:lnTo>
-                    <a:pt x="2578410" y="1183067"/>
-                  </a:lnTo>
-                  <a:lnTo>
-                    <a:pt x="2506788" y="1211015"/>
-                  </a:lnTo>
-                  <a:lnTo>
-                    <a:pt x="2435165" y="1237289"/>
-                  </a:lnTo>
-                  <a:lnTo>
-                    <a:pt x="2363543" y="1261990"/>
-                  </a:lnTo>
-                  <a:lnTo>
-                    <a:pt x="2291920" y="1285213"/>
-                  </a:lnTo>
-                  <a:lnTo>
-                    <a:pt x="2220298" y="1307045"/>
-                  </a:lnTo>
-                  <a:lnTo>
-                    <a:pt x="2148675" y="1327570"/>
-                  </a:lnTo>
-                  <a:lnTo>
-                    <a:pt x="2077053" y="1346867"/>
-                  </a:lnTo>
-                  <a:lnTo>
-                    <a:pt x="2005430" y="1365008"/>
-                  </a:lnTo>
-                  <a:lnTo>
-                    <a:pt x="1933808" y="1382063"/>
-                  </a:lnTo>
-                  <a:lnTo>
-                    <a:pt x="1862185" y="1398097"/>
-                  </a:lnTo>
-                  <a:lnTo>
-                    <a:pt x="1790563" y="1413171"/>
-                  </a:lnTo>
-                  <a:lnTo>
-                    <a:pt x="1718940" y="1427342"/>
-                  </a:lnTo>
-                  <a:lnTo>
-                    <a:pt x="1647318" y="1440665"/>
-                  </a:lnTo>
-                  <a:lnTo>
-                    <a:pt x="1575695" y="1453191"/>
-                  </a:lnTo>
-                  <a:lnTo>
-                    <a:pt x="1504073" y="1464966"/>
-                  </a:lnTo>
-                  <a:lnTo>
-                    <a:pt x="1432450" y="1476037"/>
-                  </a:lnTo>
-                  <a:lnTo>
-                    <a:pt x="1360827" y="1486445"/>
-                  </a:lnTo>
-                  <a:lnTo>
-                    <a:pt x="1289205" y="1496230"/>
-                  </a:lnTo>
-                  <a:lnTo>
-                    <a:pt x="1217582" y="1505429"/>
-                  </a:lnTo>
-                  <a:lnTo>
-                    <a:pt x="1145960" y="1514077"/>
-                  </a:lnTo>
-                  <a:lnTo>
-                    <a:pt x="1074337" y="1522207"/>
-                  </a:lnTo>
-                  <a:lnTo>
-                    <a:pt x="1002715" y="1529851"/>
-                  </a:lnTo>
-                  <a:lnTo>
-                    <a:pt x="931092" y="1537037"/>
-                  </a:lnTo>
-                  <a:lnTo>
-                    <a:pt x="859470" y="1543793"/>
-                  </a:lnTo>
-                  <a:lnTo>
-                    <a:pt x="787847" y="1550144"/>
-                  </a:lnTo>
-                  <a:lnTo>
-                    <a:pt x="716225" y="1556115"/>
-                  </a:lnTo>
-                  <a:lnTo>
-                    <a:pt x="644602" y="1561729"/>
-                  </a:lnTo>
-                  <a:lnTo>
-                    <a:pt x="572980" y="1567006"/>
-                  </a:lnTo>
-                  <a:lnTo>
-                    <a:pt x="501357" y="1571968"/>
-                  </a:lnTo>
-                  <a:lnTo>
-                    <a:pt x="429735" y="1576633"/>
-                  </a:lnTo>
-                  <a:lnTo>
-                    <a:pt x="358112" y="1581018"/>
-                  </a:lnTo>
-                  <a:lnTo>
-                    <a:pt x="286490" y="1585141"/>
-                  </a:lnTo>
-                  <a:lnTo>
-                    <a:pt x="214867" y="1589017"/>
-                  </a:lnTo>
-                  <a:lnTo>
-                    <a:pt x="143245" y="1592660"/>
-                  </a:lnTo>
-                  <a:lnTo>
-                    <a:pt x="71622" y="1596086"/>
-                  </a:lnTo>
-                  <a:lnTo>
-                    <a:pt x="0" y="1599307"/>
+                    <a:pt x="7019007" y="19585"/>
+                  </a:lnTo>
+                  <a:lnTo>
+                    <a:pt x="6947385" y="38938"/>
+                  </a:lnTo>
+                  <a:lnTo>
+                    <a:pt x="6875762" y="58059"/>
+                  </a:lnTo>
+                  <a:lnTo>
+                    <a:pt x="6804139" y="76953"/>
+                  </a:lnTo>
+                  <a:lnTo>
+                    <a:pt x="6732517" y="95622"/>
+                  </a:lnTo>
+                  <a:lnTo>
+                    <a:pt x="6660894" y="114068"/>
+                  </a:lnTo>
+                  <a:lnTo>
+                    <a:pt x="6589272" y="132294"/>
+                  </a:lnTo>
+                  <a:lnTo>
+                    <a:pt x="6517649" y="150302"/>
+                  </a:lnTo>
+                  <a:lnTo>
+                    <a:pt x="6446027" y="168096"/>
+                  </a:lnTo>
+                  <a:lnTo>
+                    <a:pt x="6374404" y="185678"/>
+                  </a:lnTo>
+                  <a:lnTo>
+                    <a:pt x="6302782" y="203051"/>
+                  </a:lnTo>
+                  <a:lnTo>
+                    <a:pt x="6231159" y="220216"/>
+                  </a:lnTo>
+                  <a:lnTo>
+                    <a:pt x="6159537" y="237177"/>
+                  </a:lnTo>
+                  <a:lnTo>
+                    <a:pt x="6087914" y="253935"/>
+                  </a:lnTo>
+                  <a:lnTo>
+                    <a:pt x="6016292" y="270494"/>
+                  </a:lnTo>
+                  <a:lnTo>
+                    <a:pt x="5944669" y="286855"/>
+                  </a:lnTo>
+                  <a:lnTo>
+                    <a:pt x="5873047" y="303021"/>
+                  </a:lnTo>
+                  <a:lnTo>
+                    <a:pt x="5801424" y="318994"/>
+                  </a:lnTo>
+                  <a:lnTo>
+                    <a:pt x="5729802" y="334777"/>
+                  </a:lnTo>
+                  <a:lnTo>
+                    <a:pt x="5658179" y="350372"/>
+                  </a:lnTo>
+                  <a:lnTo>
+                    <a:pt x="5586557" y="365781"/>
+                  </a:lnTo>
+                  <a:lnTo>
+                    <a:pt x="5514934" y="381007"/>
+                  </a:lnTo>
+                  <a:lnTo>
+                    <a:pt x="5443311" y="396050"/>
+                  </a:lnTo>
+                  <a:lnTo>
+                    <a:pt x="5371689" y="410915"/>
+                  </a:lnTo>
+                  <a:lnTo>
+                    <a:pt x="5300066" y="425602"/>
+                  </a:lnTo>
+                  <a:lnTo>
+                    <a:pt x="5228444" y="440114"/>
+                  </a:lnTo>
+                  <a:lnTo>
+                    <a:pt x="5156821" y="454453"/>
+                  </a:lnTo>
+                  <a:lnTo>
+                    <a:pt x="5085199" y="468621"/>
+                  </a:lnTo>
+                  <a:lnTo>
+                    <a:pt x="5013576" y="482621"/>
+                  </a:lnTo>
+                  <a:lnTo>
+                    <a:pt x="4941954" y="496453"/>
+                  </a:lnTo>
+                  <a:lnTo>
+                    <a:pt x="4870331" y="510120"/>
+                  </a:lnTo>
+                  <a:lnTo>
+                    <a:pt x="4798709" y="523625"/>
+                  </a:lnTo>
+                  <a:lnTo>
+                    <a:pt x="4727086" y="536968"/>
+                  </a:lnTo>
+                  <a:lnTo>
+                    <a:pt x="4655464" y="550153"/>
+                  </a:lnTo>
+                  <a:lnTo>
+                    <a:pt x="4583841" y="563180"/>
+                  </a:lnTo>
+                  <a:lnTo>
+                    <a:pt x="4512219" y="576052"/>
+                  </a:lnTo>
+                  <a:lnTo>
+                    <a:pt x="4440596" y="588771"/>
+                  </a:lnTo>
+                  <a:lnTo>
+                    <a:pt x="4368974" y="601338"/>
+                  </a:lnTo>
+                  <a:lnTo>
+                    <a:pt x="4297351" y="613755"/>
+                  </a:lnTo>
+                  <a:lnTo>
+                    <a:pt x="4225729" y="626024"/>
+                  </a:lnTo>
+                  <a:lnTo>
+                    <a:pt x="4154106" y="638147"/>
+                  </a:lnTo>
+                  <a:lnTo>
+                    <a:pt x="4082483" y="650125"/>
+                  </a:lnTo>
+                  <a:lnTo>
+                    <a:pt x="4010861" y="661960"/>
+                  </a:lnTo>
+                  <a:lnTo>
+                    <a:pt x="3939238" y="673655"/>
+                  </a:lnTo>
+                  <a:lnTo>
+                    <a:pt x="3867616" y="685210"/>
+                  </a:lnTo>
+                  <a:lnTo>
+                    <a:pt x="3795993" y="696627"/>
+                  </a:lnTo>
+                  <a:lnTo>
+                    <a:pt x="3724371" y="707908"/>
+                  </a:lnTo>
+                  <a:lnTo>
+                    <a:pt x="3652748" y="719055"/>
+                  </a:lnTo>
+                  <a:lnTo>
+                    <a:pt x="3581126" y="730069"/>
+                  </a:lnTo>
+                  <a:lnTo>
+                    <a:pt x="3509503" y="740951"/>
+                  </a:lnTo>
+                  <a:lnTo>
+                    <a:pt x="3437881" y="751704"/>
+                  </a:lnTo>
+                  <a:lnTo>
+                    <a:pt x="3366258" y="762328"/>
+                  </a:lnTo>
+                  <a:lnTo>
+                    <a:pt x="3294636" y="772826"/>
+                  </a:lnTo>
+                  <a:lnTo>
+                    <a:pt x="3223013" y="823386"/>
+                  </a:lnTo>
+                  <a:lnTo>
+                    <a:pt x="3151391" y="872543"/>
+                  </a:lnTo>
+                  <a:lnTo>
+                    <a:pt x="3079768" y="918752"/>
+                  </a:lnTo>
+                  <a:lnTo>
+                    <a:pt x="3008146" y="962190"/>
+                  </a:lnTo>
+                  <a:lnTo>
+                    <a:pt x="2936523" y="1003022"/>
+                  </a:lnTo>
+                  <a:lnTo>
+                    <a:pt x="2864901" y="1041405"/>
+                  </a:lnTo>
+                  <a:lnTo>
+                    <a:pt x="2793278" y="1077485"/>
+                  </a:lnTo>
+                  <a:lnTo>
+                    <a:pt x="2721655" y="1111401"/>
+                  </a:lnTo>
+                  <a:lnTo>
+                    <a:pt x="2650033" y="1143283"/>
+                  </a:lnTo>
+                  <a:lnTo>
+                    <a:pt x="2578410" y="1173253"/>
+                  </a:lnTo>
+                  <a:lnTo>
+                    <a:pt x="2506788" y="1201424"/>
+                  </a:lnTo>
+                  <a:lnTo>
+                    <a:pt x="2435165" y="1227906"/>
+                  </a:lnTo>
+                  <a:lnTo>
+                    <a:pt x="2363543" y="1252800"/>
+                  </a:lnTo>
+                  <a:lnTo>
+                    <a:pt x="2291920" y="1276200"/>
+                  </a:lnTo>
+                  <a:lnTo>
+                    <a:pt x="2220298" y="1298197"/>
+                  </a:lnTo>
+                  <a:lnTo>
+                    <a:pt x="2148675" y="1318874"/>
+                  </a:lnTo>
+                  <a:lnTo>
+                    <a:pt x="2077053" y="1338312"/>
+                  </a:lnTo>
+                  <a:lnTo>
+                    <a:pt x="2005430" y="1356583"/>
+                  </a:lnTo>
+                  <a:lnTo>
+                    <a:pt x="1933808" y="1373758"/>
+                  </a:lnTo>
+                  <a:lnTo>
+                    <a:pt x="1862185" y="1389903"/>
+                  </a:lnTo>
+                  <a:lnTo>
+                    <a:pt x="1790563" y="1405080"/>
+                  </a:lnTo>
+                  <a:lnTo>
+                    <a:pt x="1718940" y="1419346"/>
+                  </a:lnTo>
+                  <a:lnTo>
+                    <a:pt x="1647318" y="1432756"/>
+                  </a:lnTo>
+                  <a:lnTo>
+                    <a:pt x="1575695" y="1445363"/>
+                  </a:lnTo>
+                  <a:lnTo>
+                    <a:pt x="1504073" y="1457213"/>
+                  </a:lnTo>
+                  <a:lnTo>
+                    <a:pt x="1432450" y="1468352"/>
+                  </a:lnTo>
+                  <a:lnTo>
+                    <a:pt x="1360827" y="1478823"/>
+                  </a:lnTo>
+                  <a:lnTo>
+                    <a:pt x="1289205" y="1488666"/>
+                  </a:lnTo>
+                  <a:lnTo>
+                    <a:pt x="1217582" y="1497918"/>
+                  </a:lnTo>
+                  <a:lnTo>
+                    <a:pt x="1145960" y="1506616"/>
+                  </a:lnTo>
+                  <a:lnTo>
+                    <a:pt x="1074337" y="1514792"/>
+                  </a:lnTo>
+                  <a:lnTo>
+                    <a:pt x="1002715" y="1522477"/>
+                  </a:lnTo>
+                  <a:lnTo>
+                    <a:pt x="931092" y="1529702"/>
+                  </a:lnTo>
+                  <a:lnTo>
+                    <a:pt x="859470" y="1536493"/>
+                  </a:lnTo>
+                  <a:lnTo>
+                    <a:pt x="787847" y="1542877"/>
+                  </a:lnTo>
+                  <a:lnTo>
+                    <a:pt x="716225" y="1548877"/>
+                  </a:lnTo>
+                  <a:lnTo>
+                    <a:pt x="644602" y="1554518"/>
+                  </a:lnTo>
+                  <a:lnTo>
+                    <a:pt x="572980" y="1559821"/>
+                  </a:lnTo>
+                  <a:lnTo>
+                    <a:pt x="501357" y="1564805"/>
+                  </a:lnTo>
+                  <a:lnTo>
+                    <a:pt x="429735" y="1569491"/>
+                  </a:lnTo>
+                  <a:lnTo>
+                    <a:pt x="358112" y="1573895"/>
+                  </a:lnTo>
+                  <a:lnTo>
+                    <a:pt x="286490" y="1578036"/>
+                  </a:lnTo>
+                  <a:lnTo>
+                    <a:pt x="214867" y="1581928"/>
+                  </a:lnTo>
+                  <a:lnTo>
+                    <a:pt x="143245" y="1585586"/>
+                  </a:lnTo>
+                  <a:lnTo>
+                    <a:pt x="71622" y="1589025"/>
+                  </a:lnTo>
+                  <a:lnTo>
+                    <a:pt x="0" y="1592258"/>
                   </a:lnTo>
                 </a:path>
               </a:pathLst>
@@ -4070,269 +4070,269 @@
           <p:spPr>
             <a:xfrm>
               <a:off x="1172049" y="1896563"/>
-              <a:ext cx="6084329" cy="3493943"/>
+              <a:ext cx="6075187" cy="3493302"/>
             </a:xfrm>
             <a:custGeom>
               <a:avLst/>
               <a:pathLst>
-                <a:path w="6084329" h="3493943">
+                <a:path w="6075187" h="3493302">
                   <a:moveTo>
-                    <a:pt x="0" y="3493943"/>
+                    <a:pt x="0" y="3493302"/>
                   </a:moveTo>
                   <a:lnTo>
-                    <a:pt x="71622" y="3487975"/>
-                  </a:lnTo>
-                  <a:lnTo>
-                    <a:pt x="143245" y="3481782"/>
-                  </a:lnTo>
-                  <a:lnTo>
-                    <a:pt x="214867" y="3475356"/>
-                  </a:lnTo>
-                  <a:lnTo>
-                    <a:pt x="286490" y="3468689"/>
-                  </a:lnTo>
-                  <a:lnTo>
-                    <a:pt x="358112" y="3461771"/>
-                  </a:lnTo>
-                  <a:lnTo>
-                    <a:pt x="429735" y="3454593"/>
-                  </a:lnTo>
-                  <a:lnTo>
-                    <a:pt x="501357" y="3447144"/>
-                  </a:lnTo>
-                  <a:lnTo>
-                    <a:pt x="572980" y="3439416"/>
-                  </a:lnTo>
-                  <a:lnTo>
-                    <a:pt x="644602" y="3431397"/>
-                  </a:lnTo>
-                  <a:lnTo>
-                    <a:pt x="716225" y="3423077"/>
-                  </a:lnTo>
-                  <a:lnTo>
-                    <a:pt x="787847" y="3414443"/>
-                  </a:lnTo>
-                  <a:lnTo>
-                    <a:pt x="859470" y="3405485"/>
-                  </a:lnTo>
-                  <a:lnTo>
-                    <a:pt x="931092" y="3396190"/>
-                  </a:lnTo>
-                  <a:lnTo>
-                    <a:pt x="1002715" y="3386545"/>
-                  </a:lnTo>
-                  <a:lnTo>
-                    <a:pt x="1074337" y="3376538"/>
-                  </a:lnTo>
-                  <a:lnTo>
-                    <a:pt x="1145960" y="3366154"/>
-                  </a:lnTo>
-                  <a:lnTo>
-                    <a:pt x="1217582" y="3355380"/>
-                  </a:lnTo>
-                  <a:lnTo>
-                    <a:pt x="1289205" y="3344201"/>
-                  </a:lnTo>
-                  <a:lnTo>
-                    <a:pt x="1360827" y="3332601"/>
-                  </a:lnTo>
-                  <a:lnTo>
-                    <a:pt x="1432450" y="3320565"/>
-                  </a:lnTo>
-                  <a:lnTo>
-                    <a:pt x="1504073" y="3308076"/>
-                  </a:lnTo>
-                  <a:lnTo>
-                    <a:pt x="1575695" y="3295118"/>
-                  </a:lnTo>
-                  <a:lnTo>
-                    <a:pt x="1647318" y="3281672"/>
-                  </a:lnTo>
-                  <a:lnTo>
-                    <a:pt x="1718940" y="3267721"/>
-                  </a:lnTo>
-                  <a:lnTo>
-                    <a:pt x="1790563" y="3253245"/>
-                  </a:lnTo>
-                  <a:lnTo>
-                    <a:pt x="1862185" y="3238224"/>
-                  </a:lnTo>
-                  <a:lnTo>
-                    <a:pt x="1933808" y="3222639"/>
-                  </a:lnTo>
-                  <a:lnTo>
-                    <a:pt x="2005430" y="3206468"/>
-                  </a:lnTo>
-                  <a:lnTo>
-                    <a:pt x="2077053" y="3189688"/>
-                  </a:lnTo>
-                  <a:lnTo>
-                    <a:pt x="2148675" y="3172277"/>
-                  </a:lnTo>
-                  <a:lnTo>
-                    <a:pt x="2220298" y="3154212"/>
-                  </a:lnTo>
-                  <a:lnTo>
-                    <a:pt x="2291920" y="3135467"/>
-                  </a:lnTo>
-                  <a:lnTo>
-                    <a:pt x="2363543" y="3116017"/>
-                  </a:lnTo>
-                  <a:lnTo>
-                    <a:pt x="2435165" y="3095836"/>
-                  </a:lnTo>
-                  <a:lnTo>
-                    <a:pt x="2506788" y="3074896"/>
-                  </a:lnTo>
-                  <a:lnTo>
-                    <a:pt x="2578410" y="3053168"/>
-                  </a:lnTo>
-                  <a:lnTo>
-                    <a:pt x="2650033" y="3030623"/>
-                  </a:lnTo>
-                  <a:lnTo>
-                    <a:pt x="2721655" y="3007231"/>
-                  </a:lnTo>
-                  <a:lnTo>
-                    <a:pt x="2793278" y="2982958"/>
-                  </a:lnTo>
-                  <a:lnTo>
-                    <a:pt x="2864901" y="2957773"/>
-                  </a:lnTo>
-                  <a:lnTo>
-                    <a:pt x="2936523" y="2931641"/>
-                  </a:lnTo>
-                  <a:lnTo>
-                    <a:pt x="3008146" y="2904525"/>
-                  </a:lnTo>
-                  <a:lnTo>
-                    <a:pt x="3079768" y="2876390"/>
-                  </a:lnTo>
-                  <a:lnTo>
-                    <a:pt x="3151391" y="2847197"/>
-                  </a:lnTo>
-                  <a:lnTo>
-                    <a:pt x="3223013" y="2816906"/>
-                  </a:lnTo>
-                  <a:lnTo>
-                    <a:pt x="3294636" y="2785476"/>
-                  </a:lnTo>
-                  <a:lnTo>
-                    <a:pt x="3366258" y="2752864"/>
-                  </a:lnTo>
-                  <a:lnTo>
-                    <a:pt x="3437881" y="2719026"/>
-                  </a:lnTo>
-                  <a:lnTo>
-                    <a:pt x="3509503" y="2683915"/>
-                  </a:lnTo>
-                  <a:lnTo>
-                    <a:pt x="3581126" y="2647483"/>
-                  </a:lnTo>
-                  <a:lnTo>
-                    <a:pt x="3652748" y="2609681"/>
-                  </a:lnTo>
-                  <a:lnTo>
-                    <a:pt x="3724371" y="2570458"/>
-                  </a:lnTo>
-                  <a:lnTo>
-                    <a:pt x="3795993" y="2529759"/>
-                  </a:lnTo>
-                  <a:lnTo>
-                    <a:pt x="3867616" y="2487530"/>
-                  </a:lnTo>
-                  <a:lnTo>
-                    <a:pt x="3939238" y="2443713"/>
-                  </a:lnTo>
-                  <a:lnTo>
-                    <a:pt x="4010861" y="2398248"/>
-                  </a:lnTo>
-                  <a:lnTo>
-                    <a:pt x="4082483" y="2351073"/>
-                  </a:lnTo>
-                  <a:lnTo>
-                    <a:pt x="4154106" y="2302125"/>
-                  </a:lnTo>
-                  <a:lnTo>
-                    <a:pt x="4225729" y="2251335"/>
-                  </a:lnTo>
-                  <a:lnTo>
-                    <a:pt x="4297351" y="2198635"/>
-                  </a:lnTo>
-                  <a:lnTo>
-                    <a:pt x="4368974" y="2143953"/>
-                  </a:lnTo>
-                  <a:lnTo>
-                    <a:pt x="4440596" y="2087215"/>
-                  </a:lnTo>
-                  <a:lnTo>
-                    <a:pt x="4512219" y="2028343"/>
-                  </a:lnTo>
-                  <a:lnTo>
-                    <a:pt x="4583841" y="1967256"/>
-                  </a:lnTo>
-                  <a:lnTo>
-                    <a:pt x="4655464" y="1903873"/>
-                  </a:lnTo>
-                  <a:lnTo>
-                    <a:pt x="4727086" y="1838106"/>
-                  </a:lnTo>
-                  <a:lnTo>
-                    <a:pt x="4798709" y="1769865"/>
-                  </a:lnTo>
-                  <a:lnTo>
-                    <a:pt x="4870331" y="1699059"/>
-                  </a:lnTo>
-                  <a:lnTo>
-                    <a:pt x="4941954" y="1625589"/>
-                  </a:lnTo>
-                  <a:lnTo>
-                    <a:pt x="5013576" y="1549356"/>
-                  </a:lnTo>
-                  <a:lnTo>
-                    <a:pt x="5085199" y="1470257"/>
-                  </a:lnTo>
-                  <a:lnTo>
-                    <a:pt x="5156821" y="1388182"/>
-                  </a:lnTo>
-                  <a:lnTo>
-                    <a:pt x="5228444" y="1303021"/>
-                  </a:lnTo>
-                  <a:lnTo>
-                    <a:pt x="5300066" y="1214657"/>
-                  </a:lnTo>
-                  <a:lnTo>
-                    <a:pt x="5371689" y="1122970"/>
-                  </a:lnTo>
-                  <a:lnTo>
-                    <a:pt x="5443311" y="1027835"/>
-                  </a:lnTo>
-                  <a:lnTo>
-                    <a:pt x="5514934" y="929123"/>
-                  </a:lnTo>
-                  <a:lnTo>
-                    <a:pt x="5586557" y="826697"/>
-                  </a:lnTo>
-                  <a:lnTo>
-                    <a:pt x="5658179" y="720420"/>
-                  </a:lnTo>
-                  <a:lnTo>
-                    <a:pt x="5729802" y="610146"/>
-                  </a:lnTo>
-                  <a:lnTo>
-                    <a:pt x="5801424" y="495725"/>
-                  </a:lnTo>
-                  <a:lnTo>
-                    <a:pt x="5873047" y="377001"/>
-                  </a:lnTo>
-                  <a:lnTo>
-                    <a:pt x="5944669" y="253812"/>
-                  </a:lnTo>
-                  <a:lnTo>
-                    <a:pt x="6016292" y="125990"/>
-                  </a:lnTo>
-                  <a:lnTo>
-                    <a:pt x="6084329" y="0"/>
+                    <a:pt x="71622" y="3487308"/>
+                  </a:lnTo>
+                  <a:lnTo>
+                    <a:pt x="143245" y="3481089"/>
+                  </a:lnTo>
+                  <a:lnTo>
+                    <a:pt x="214867" y="3474636"/>
+                  </a:lnTo>
+                  <a:lnTo>
+                    <a:pt x="286490" y="3467940"/>
+                  </a:lnTo>
+                  <a:lnTo>
+                    <a:pt x="358112" y="3460992"/>
+                  </a:lnTo>
+                  <a:lnTo>
+                    <a:pt x="429735" y="3453783"/>
+                  </a:lnTo>
+                  <a:lnTo>
+                    <a:pt x="501357" y="3446303"/>
+                  </a:lnTo>
+                  <a:lnTo>
+                    <a:pt x="572980" y="3438542"/>
+                  </a:lnTo>
+                  <a:lnTo>
+                    <a:pt x="644602" y="3430488"/>
+                  </a:lnTo>
+                  <a:lnTo>
+                    <a:pt x="716225" y="3422132"/>
+                  </a:lnTo>
+                  <a:lnTo>
+                    <a:pt x="787847" y="3413461"/>
+                  </a:lnTo>
+                  <a:lnTo>
+                    <a:pt x="859470" y="3404464"/>
+                  </a:lnTo>
+                  <a:lnTo>
+                    <a:pt x="931092" y="3395129"/>
+                  </a:lnTo>
+                  <a:lnTo>
+                    <a:pt x="1002715" y="3385443"/>
+                  </a:lnTo>
+                  <a:lnTo>
+                    <a:pt x="1074337" y="3375392"/>
+                  </a:lnTo>
+                  <a:lnTo>
+                    <a:pt x="1145960" y="3364963"/>
+                  </a:lnTo>
+                  <a:lnTo>
+                    <a:pt x="1217582" y="3354142"/>
+                  </a:lnTo>
+                  <a:lnTo>
+                    <a:pt x="1289205" y="3342914"/>
+                  </a:lnTo>
+                  <a:lnTo>
+                    <a:pt x="1360827" y="3331263"/>
+                  </a:lnTo>
+                  <a:lnTo>
+                    <a:pt x="1432450" y="3319175"/>
+                  </a:lnTo>
+                  <a:lnTo>
+                    <a:pt x="1504073" y="3306631"/>
+                  </a:lnTo>
+                  <a:lnTo>
+                    <a:pt x="1575695" y="3293616"/>
+                  </a:lnTo>
+                  <a:lnTo>
+                    <a:pt x="1647318" y="3280111"/>
+                  </a:lnTo>
+                  <a:lnTo>
+                    <a:pt x="1718940" y="3266098"/>
+                  </a:lnTo>
+                  <a:lnTo>
+                    <a:pt x="1790563" y="3251558"/>
+                  </a:lnTo>
+                  <a:lnTo>
+                    <a:pt x="1862185" y="3236471"/>
+                  </a:lnTo>
+                  <a:lnTo>
+                    <a:pt x="1933808" y="3220817"/>
+                  </a:lnTo>
+                  <a:lnTo>
+                    <a:pt x="2005430" y="3204574"/>
+                  </a:lnTo>
+                  <a:lnTo>
+                    <a:pt x="2077053" y="3187720"/>
+                  </a:lnTo>
+                  <a:lnTo>
+                    <a:pt x="2148675" y="3170231"/>
+                  </a:lnTo>
+                  <a:lnTo>
+                    <a:pt x="2220298" y="3152085"/>
+                  </a:lnTo>
+                  <a:lnTo>
+                    <a:pt x="2291920" y="3133257"/>
+                  </a:lnTo>
+                  <a:lnTo>
+                    <a:pt x="2363543" y="3113720"/>
+                  </a:lnTo>
+                  <a:lnTo>
+                    <a:pt x="2435165" y="3093448"/>
+                  </a:lnTo>
+                  <a:lnTo>
+                    <a:pt x="2506788" y="3072414"/>
+                  </a:lnTo>
+                  <a:lnTo>
+                    <a:pt x="2578410" y="3050589"/>
+                  </a:lnTo>
+                  <a:lnTo>
+                    <a:pt x="2650033" y="3027942"/>
+                  </a:lnTo>
+                  <a:lnTo>
+                    <a:pt x="2721655" y="3004444"/>
+                  </a:lnTo>
+                  <a:lnTo>
+                    <a:pt x="2793278" y="2980062"/>
+                  </a:lnTo>
+                  <a:lnTo>
+                    <a:pt x="2864901" y="2954763"/>
+                  </a:lnTo>
+                  <a:lnTo>
+                    <a:pt x="2936523" y="2928512"/>
+                  </a:lnTo>
+                  <a:lnTo>
+                    <a:pt x="3008146" y="2901274"/>
+                  </a:lnTo>
+                  <a:lnTo>
+                    <a:pt x="3079768" y="2873011"/>
+                  </a:lnTo>
+                  <a:lnTo>
+                    <a:pt x="3151391" y="2843685"/>
+                  </a:lnTo>
+                  <a:lnTo>
+                    <a:pt x="3223013" y="2813256"/>
+                  </a:lnTo>
+                  <a:lnTo>
+                    <a:pt x="3294636" y="2781682"/>
+                  </a:lnTo>
+                  <a:lnTo>
+                    <a:pt x="3366258" y="2748921"/>
+                  </a:lnTo>
+                  <a:lnTo>
+                    <a:pt x="3437881" y="2714927"/>
+                  </a:lnTo>
+                  <a:lnTo>
+                    <a:pt x="3509503" y="2679655"/>
+                  </a:lnTo>
+                  <a:lnTo>
+                    <a:pt x="3581126" y="2643056"/>
+                  </a:lnTo>
+                  <a:lnTo>
+                    <a:pt x="3652748" y="2605080"/>
+                  </a:lnTo>
+                  <a:lnTo>
+                    <a:pt x="3724371" y="2565676"/>
+                  </a:lnTo>
+                  <a:lnTo>
+                    <a:pt x="3795993" y="2524790"/>
+                  </a:lnTo>
+                  <a:lnTo>
+                    <a:pt x="3867616" y="2482365"/>
+                  </a:lnTo>
+                  <a:lnTo>
+                    <a:pt x="3939238" y="2438345"/>
+                  </a:lnTo>
+                  <a:lnTo>
+                    <a:pt x="4010861" y="2392669"/>
+                  </a:lnTo>
+                  <a:lnTo>
+                    <a:pt x="4082483" y="2345275"/>
+                  </a:lnTo>
+                  <a:lnTo>
+                    <a:pt x="4154106" y="2296098"/>
+                  </a:lnTo>
+                  <a:lnTo>
+                    <a:pt x="4225729" y="2245072"/>
+                  </a:lnTo>
+                  <a:lnTo>
+                    <a:pt x="4297351" y="2192126"/>
+                  </a:lnTo>
+                  <a:lnTo>
+                    <a:pt x="4368974" y="2137188"/>
+                  </a:lnTo>
+                  <a:lnTo>
+                    <a:pt x="4440596" y="2080184"/>
+                  </a:lnTo>
+                  <a:lnTo>
+                    <a:pt x="4512219" y="2021036"/>
+                  </a:lnTo>
+                  <a:lnTo>
+                    <a:pt x="4583841" y="1959663"/>
+                  </a:lnTo>
+                  <a:lnTo>
+                    <a:pt x="4655464" y="1895981"/>
+                  </a:lnTo>
+                  <a:lnTo>
+                    <a:pt x="4727086" y="1829904"/>
+                  </a:lnTo>
+                  <a:lnTo>
+                    <a:pt x="4798709" y="1761342"/>
+                  </a:lnTo>
+                  <a:lnTo>
+                    <a:pt x="4870331" y="1690200"/>
+                  </a:lnTo>
+                  <a:lnTo>
+                    <a:pt x="4941954" y="1616383"/>
+                  </a:lnTo>
+                  <a:lnTo>
+                    <a:pt x="5013576" y="1539789"/>
+                  </a:lnTo>
+                  <a:lnTo>
+                    <a:pt x="5085199" y="1460313"/>
+                  </a:lnTo>
+                  <a:lnTo>
+                    <a:pt x="5156821" y="1377849"/>
+                  </a:lnTo>
+                  <a:lnTo>
+                    <a:pt x="5228444" y="1292282"/>
+                  </a:lnTo>
+                  <a:lnTo>
+                    <a:pt x="5300066" y="1203497"/>
+                  </a:lnTo>
+                  <a:lnTo>
+                    <a:pt x="5371689" y="1111372"/>
+                  </a:lnTo>
+                  <a:lnTo>
+                    <a:pt x="5443311" y="1015782"/>
+                  </a:lnTo>
+                  <a:lnTo>
+                    <a:pt x="5514934" y="916596"/>
+                  </a:lnTo>
+                  <a:lnTo>
+                    <a:pt x="5586557" y="813679"/>
+                  </a:lnTo>
+                  <a:lnTo>
+                    <a:pt x="5658179" y="706891"/>
+                  </a:lnTo>
+                  <a:lnTo>
+                    <a:pt x="5729802" y="596086"/>
+                  </a:lnTo>
+                  <a:lnTo>
+                    <a:pt x="5801424" y="481113"/>
+                  </a:lnTo>
+                  <a:lnTo>
+                    <a:pt x="5873047" y="361816"/>
+                  </a:lnTo>
+                  <a:lnTo>
+                    <a:pt x="5944669" y="238031"/>
+                  </a:lnTo>
+                  <a:lnTo>
+                    <a:pt x="6016292" y="109590"/>
+                  </a:lnTo>
+                  <a:lnTo>
+                    <a:pt x="6075187" y="0"/>
                   </a:lnTo>
                 </a:path>
               </a:pathLst>
@@ -4404,7 +4404,7 @@
           </p:nvSpPr>
           <p:spPr>
             <a:xfrm>
-              <a:off x="4472293" y="1896563"/>
+              <a:off x="4463824" y="1896563"/>
               <a:ext cx="0" cy="3826579"/>
             </a:xfrm>
             <a:custGeom>
@@ -4677,7 +4677,7 @@
           </p:nvSpPr>
           <p:spPr>
             <a:xfrm>
-              <a:off x="2004858" y="5785772"/>
+              <a:off x="2005445" y="5785772"/>
               <a:ext cx="223753" cy="80101"/>
             </a:xfrm>
             <a:prstGeom prst="rect">
@@ -4723,7 +4723,7 @@
           </p:nvSpPr>
           <p:spPr>
             <a:xfrm>
-              <a:off x="4499764" y="5785772"/>
+              <a:off x="4497209" y="5785772"/>
               <a:ext cx="62179" cy="80101"/>
             </a:xfrm>
             <a:prstGeom prst="rect">
@@ -4769,7 +4769,7 @@
           </p:nvSpPr>
           <p:spPr>
             <a:xfrm>
-              <a:off x="6851704" y="5785772"/>
+              <a:off x="6846007" y="5785772"/>
               <a:ext cx="186537" cy="80101"/>
             </a:xfrm>
             <a:prstGeom prst="rect">
